--- a/Figures/FIG_SURVIVAL_NEW.pptx
+++ b/Figures/FIG_SURVIVAL_NEW.pptx
@@ -3499,6 +3499,120 @@
           </a:prstGeom>
         </p:spPr>
       </p:pic>
+      <p:sp>
+        <p:nvSpPr>
+          <p:cNvPr id="21" name="TextBox 20">
+            <a:extLst>
+              <a:ext uri="{FF2B5EF4-FFF2-40B4-BE49-F238E27FC236}">
+                <a16:creationId xmlns:a16="http://schemas.microsoft.com/office/drawing/2014/main" id="{734739C3-041B-7A9D-3226-169CB7178005}"/>
+              </a:ext>
+            </a:extLst>
+          </p:cNvPr>
+          <p:cNvSpPr txBox="1"/>
+          <p:nvPr/>
+        </p:nvSpPr>
+        <p:spPr>
+          <a:xfrm>
+            <a:off x="0" y="0"/>
+            <a:ext cx="242374" cy="215444"/>
+          </a:xfrm>
+          <a:prstGeom prst="rect">
+            <a:avLst/>
+          </a:prstGeom>
+          <a:noFill/>
+        </p:spPr>
+        <p:txBody>
+          <a:bodyPr wrap="none" rtlCol="0">
+            <a:spAutoFit/>
+          </a:bodyPr>
+          <a:lstStyle/>
+          <a:p>
+            <a:r>
+              <a:rPr lang="en-US" sz="800" b="1" dirty="0">
+                <a:latin typeface="Arial" panose="020B0604020202020204" pitchFamily="34" charset="0"/>
+                <a:cs typeface="Arial" panose="020B0604020202020204" pitchFamily="34" charset="0"/>
+              </a:rPr>
+              <a:t>a</a:t>
+            </a:r>
+          </a:p>
+        </p:txBody>
+      </p:sp>
+      <p:sp>
+        <p:nvSpPr>
+          <p:cNvPr id="22" name="TextBox 21">
+            <a:extLst>
+              <a:ext uri="{FF2B5EF4-FFF2-40B4-BE49-F238E27FC236}">
+                <a16:creationId xmlns:a16="http://schemas.microsoft.com/office/drawing/2014/main" id="{52445C9A-6CE8-95BD-A39D-09761A0102A5}"/>
+              </a:ext>
+            </a:extLst>
+          </p:cNvPr>
+          <p:cNvSpPr txBox="1"/>
+          <p:nvPr/>
+        </p:nvSpPr>
+        <p:spPr>
+          <a:xfrm>
+            <a:off x="1976390" y="0"/>
+            <a:ext cx="247184" cy="215444"/>
+          </a:xfrm>
+          <a:prstGeom prst="rect">
+            <a:avLst/>
+          </a:prstGeom>
+          <a:noFill/>
+        </p:spPr>
+        <p:txBody>
+          <a:bodyPr wrap="none" rtlCol="0">
+            <a:spAutoFit/>
+          </a:bodyPr>
+          <a:lstStyle/>
+          <a:p>
+            <a:r>
+              <a:rPr lang="en-US" sz="800" b="1" dirty="0">
+                <a:latin typeface="Arial" panose="020B0604020202020204" pitchFamily="34" charset="0"/>
+                <a:cs typeface="Arial" panose="020B0604020202020204" pitchFamily="34" charset="0"/>
+              </a:rPr>
+              <a:t>b</a:t>
+            </a:r>
+          </a:p>
+        </p:txBody>
+      </p:sp>
+      <p:sp>
+        <p:nvSpPr>
+          <p:cNvPr id="23" name="TextBox 22">
+            <a:extLst>
+              <a:ext uri="{FF2B5EF4-FFF2-40B4-BE49-F238E27FC236}">
+                <a16:creationId xmlns:a16="http://schemas.microsoft.com/office/drawing/2014/main" id="{7FE0FBF5-9D0E-5BC4-266F-F17A8F1E21C3}"/>
+              </a:ext>
+            </a:extLst>
+          </p:cNvPr>
+          <p:cNvSpPr txBox="1"/>
+          <p:nvPr/>
+        </p:nvSpPr>
+        <p:spPr>
+          <a:xfrm>
+            <a:off x="3967210" y="0"/>
+            <a:ext cx="242374" cy="215444"/>
+          </a:xfrm>
+          <a:prstGeom prst="rect">
+            <a:avLst/>
+          </a:prstGeom>
+          <a:noFill/>
+        </p:spPr>
+        <p:txBody>
+          <a:bodyPr wrap="none" rtlCol="0">
+            <a:spAutoFit/>
+          </a:bodyPr>
+          <a:lstStyle/>
+          <a:p>
+            <a:r>
+              <a:rPr lang="en-US" sz="800" b="1" dirty="0">
+                <a:latin typeface="Arial" panose="020B0604020202020204" pitchFamily="34" charset="0"/>
+                <a:cs typeface="Arial" panose="020B0604020202020204" pitchFamily="34" charset="0"/>
+              </a:rPr>
+              <a:t>c</a:t>
+            </a:r>
+          </a:p>
+        </p:txBody>
+      </p:sp>
     </p:spTree>
     <p:extLst>
       <p:ext uri="{BB962C8B-B14F-4D97-AF65-F5344CB8AC3E}">
